--- a/harness-map/harness-map.pptx
+++ b/harness-map/harness-map.pptx
@@ -2098,7 +2098,7 @@
                 <a:ea typeface="Malgun Gothic" pitchFamily="34" charset="-122"/>
                 <a:cs typeface="Malgun Gothic" pitchFamily="34" charset="-120"/>
               </a:rPr>
-              <a:t>대단원 5 · 에이전트 시스템 마스터 · 하네스 톺아보기 ⑩</a:t>
+              <a:t>대단원 5 · 에이전트 시스템 마스터 · 하네스 돌아보기 ⑩</a:t>
             </a:r>
             <a:endParaRPr lang="en-US" sz="1400" dirty="0"/>
           </a:p>
@@ -4642,7 +4642,7 @@
                 <a:ea typeface="Malgun Gothic" pitchFamily="34" charset="-122"/>
                 <a:cs typeface="Malgun Gothic" pitchFamily="34" charset="-120"/>
               </a:rPr>
-              <a:t>에이전트 하네스 톺아보기 ⑩ — 여기까지</a:t>
+              <a:t>에이전트 하네스 돌아보기 ⑩ — 여기까지</a:t>
             </a:r>
             <a:endParaRPr lang="en-US" sz="1800" dirty="0"/>
           </a:p>

--- a/harness-map/harness-map.pptx
+++ b/harness-map/harness-map.pptx
@@ -2098,7 +2098,7 @@
                 <a:ea typeface="Malgun Gothic" pitchFamily="34" charset="-122"/>
                 <a:cs typeface="Malgun Gothic" pitchFamily="34" charset="-120"/>
               </a:rPr>
-              <a:t>대단원 5 · 에이전트 시스템 마스터 · 하네스 돌아보기 ⑩</a:t>
+              <a:t>대단원 5 · 에이전트 시스템 마스터 · 하네스 톺아보기 ⑩</a:t>
             </a:r>
             <a:endParaRPr lang="en-US" sz="1400" dirty="0"/>
           </a:p>
@@ -4642,7 +4642,7 @@
                 <a:ea typeface="Malgun Gothic" pitchFamily="34" charset="-122"/>
                 <a:cs typeface="Malgun Gothic" pitchFamily="34" charset="-120"/>
               </a:rPr>
-              <a:t>에이전트 하네스 돌아보기 ⑩ — 여기까지</a:t>
+              <a:t>에이전트 하네스 톺아보기 ⑩ — 여기까지</a:t>
             </a:r>
             <a:endParaRPr lang="en-US" sz="1800" dirty="0"/>
           </a:p>
